--- a/presentation/Increasing-GPU-Computation-Efficiency-with-CUDA-Streams.pptx
+++ b/presentation/Increasing-GPU-Computation-Efficiency-with-CUDA-Streams.pptx
@@ -140,6 +140,43 @@
     </p:ext>
   </p:extLst>
 </p:presentation>
+</file>
+
+<file path=ppt/revisionInfo.xml><?xml version="1.0" encoding="utf-8"?>
+<p1510:revInfo xmlns:a="http://schemas.openxmlformats.org/drawingml/2006/main" xmlns:r="http://schemas.openxmlformats.org/officeDocument/2006/relationships" xmlns:p1510="http://schemas.microsoft.com/office/powerpoint/2015/10/main">
+  <p1510:revLst>
+    <p1510:client id="{2FAF56F3-E55B-43D4-BC4E-C70F2C09830E}" v="1" dt="2026-05-09T18:17:14.507"/>
+  </p1510:revLst>
+</p1510:revInfo>
+</file>
+
+<file path=ppt/changesInfos/changesInfo1.xml><?xml version="1.0" encoding="utf-8"?>
+<pc:chgInfo xmlns:a="http://schemas.openxmlformats.org/drawingml/2006/main" xmlns:r="http://schemas.openxmlformats.org/officeDocument/2006/relationships" xmlns:ac="http://schemas.microsoft.com/office/drawing/2013/main/command" xmlns:pc="http://schemas.microsoft.com/office/powerpoint/2013/main/command">
+  <pc:docChgLst>
+    <pc:chgData name="Jaechang Lee" userId="62693b6669ffb0cb" providerId="LiveId" clId="{B5324815-CB0E-4374-94CF-DEEFC5746540}"/>
+    <pc:docChg chg="modSld">
+      <pc:chgData name="Jaechang Lee" userId="62693b6669ffb0cb" providerId="LiveId" clId="{B5324815-CB0E-4374-94CF-DEEFC5746540}" dt="2026-05-09T18:17:39.946" v="5" actId="20577"/>
+      <pc:docMkLst>
+        <pc:docMk/>
+      </pc:docMkLst>
+      <pc:sldChg chg="modSp mod">
+        <pc:chgData name="Jaechang Lee" userId="62693b6669ffb0cb" providerId="LiveId" clId="{B5324815-CB0E-4374-94CF-DEEFC5746540}" dt="2026-05-09T18:17:39.946" v="5" actId="20577"/>
+        <pc:sldMkLst>
+          <pc:docMk/>
+          <pc:sldMk cId="2928268000" sldId="266"/>
+        </pc:sldMkLst>
+        <pc:spChg chg="mod">
+          <ac:chgData name="Jaechang Lee" userId="62693b6669ffb0cb" providerId="LiveId" clId="{B5324815-CB0E-4374-94CF-DEEFC5746540}" dt="2026-05-09T18:17:39.946" v="5" actId="20577"/>
+          <ac:spMkLst>
+            <pc:docMk/>
+            <pc:sldMk cId="2928268000" sldId="266"/>
+            <ac:spMk id="14" creationId="{668D350E-1A88-08AE-0107-B77677CEBA14}"/>
+          </ac:spMkLst>
+        </pc:spChg>
+      </pc:sldChg>
+    </pc:docChg>
+  </pc:docChgLst>
+</pc:chgInfo>
 </file>
 
 <file path=ppt/notesMasters/notesMaster1.xml><?xml version="1.0" encoding="utf-8"?>
@@ -3883,7 +3920,35 @@
               <a:rPr lang="en-US" sz="1100" dirty="0">
                 <a:latin typeface="Instrument Sans Medium" panose="020B0604020202020204" charset="0"/>
               </a:rPr>
-              <a:t>[6] CUDA benchmark data, Nsight Systems profiler results, and experimental implementations from course project files. </a:t>
+              <a:t>[6] Jaechang Lee, “CPS343 Final Project Repository.”</a:t>
+            </a:r>
+            <a:br>
+              <a:rPr lang="en-US" sz="1100" dirty="0">
+                <a:latin typeface="Instrument Sans Medium" panose="020B0604020202020204" charset="0"/>
+              </a:rPr>
+            </a:br>
+            <a:r>
+              <a:rPr lang="en-US" sz="1100" dirty="0">
+                <a:latin typeface="Instrument Sans Medium" panose="020B0604020202020204" charset="0"/>
+                <a:hlinkClick r:id="rId8"/>
+              </a:rPr>
+              <a:t>GitHub Repository</a:t>
+            </a:r>
+            <a:endParaRPr lang="en-US" sz="1100" dirty="0">
+              <a:latin typeface="Instrument Sans Medium" panose="020B0604020202020204" charset="0"/>
+            </a:endParaRPr>
+          </a:p>
+          <a:p>
+            <a:endParaRPr lang="en-US" sz="1100" dirty="0">
+              <a:latin typeface="Instrument Sans Medium" panose="020B0604020202020204" charset="0"/>
+            </a:endParaRPr>
+          </a:p>
+          <a:p>
+            <a:r>
+              <a:rPr lang="en-US" sz="1100" dirty="0">
+                <a:latin typeface="Instrument Sans Medium" panose="020B0604020202020204" charset="0"/>
+              </a:rPr>
+              <a:t>[7] CUDA benchmark data, Nsight Systems profiler results, and experimental implementations from course project files. </a:t>
             </a:r>
           </a:p>
         </p:txBody>
